--- a/week-04/presentations/ppts/day-02-system-security-compliance.pptx
+++ b/week-04/presentations/ppts/day-02-system-security-compliance.pptx
@@ -6124,6 +6124,23 @@
         <p:txBody>
           <a:bodyPr/>
           <a:lstStyle/>
+          <a:p>
+            <a:pPr lvl="0" indent="0">
+              <a:buNone/>
+            </a:pPr>
+            <a:r>
+              <a:rPr>
+                <a:latin typeface="Courier"/>
+              </a:rPr>
+              <a:t># Security brief — &lt;feature&gt;
+## Summary (3 bullets)
+## Data flow
+(link to TCD §2)
+## Top 5 threats (from STRIDE pass)
+## Open questions for security team
+## Decisions we've already made (and their justification)</a:t>
+            </a:r>
+          </a:p>
           <a:p>
             <a:pPr lvl="0" indent="0" marL="0">
               <a:buNone/>

--- a/week-04/presentations/ppts/day-02-system-security-compliance.pptx
+++ b/week-04/presentations/ppts/day-02-system-security-compliance.pptx
@@ -955,7 +955,7 @@
             </a:pPr>
             <a:r>
               <a:rPr/>
-              <a:t>Triads should keep their PRD §7 in place — but reference the TCD §3 as the authoritative version for the architecture conversation.</a:t>
+              <a:t>Triads should keep their PRD Section 7 in place — but reference the TCD Section 3 as the authoritative version for the architecture conversation.</a:t>
             </a:r>
           </a:p>
         </p:txBody>
@@ -1447,7 +1447,7 @@
             </a:pPr>
             <a:r>
               <a:rPr/>
-              <a:t>Today produces TCD §3 — supersedes PRD §7’s first-draft security NFRs.</a:t>
+              <a:t>Today produces TCD Section 3 — supersedes PRD Section 7’s first-draft security NFRs.</a:t>
             </a:r>
           </a:p>
         </p:txBody>
@@ -5413,7 +5413,7 @@
             </a:pPr>
             <a:r>
               <a:rPr/>
-              <a:t>Re-draw the data flow from yesterday’s integration table + PRD §5. Run the STRIDE walk. Document top 5 threats.</a:t>
+              <a:t>Re-draw the data flow from yesterday’s integration table + PRD Section 5. Run the STRIDE walk. Document top 5 threats.</a:t>
             </a:r>
           </a:p>
           <a:p>
@@ -5863,7 +5863,7 @@
             </a:pPr>
             <a:r>
               <a:rPr/>
-              <a:t>The TCD §3 doesn’t replace PRD §7. It deepens it. Both ship.</a:t>
+              <a:t>The TCD Section 3 doesn’t replace PRD Section 7. It deepens it. Both ship.</a:t>
             </a:r>
           </a:p>
         </p:txBody>
@@ -6135,7 +6135,7 @@
               <a:t># Security brief — &lt;feature&gt;
 ## Summary (3 bullets)
 ## Data flow
-(link to TCD §2)
+(link to TCD Section 2)
 ## Top 5 threats (from STRIDE pass)
 ## Open questions for security team
 ## Decisions we've already made (and their justification)</a:t>
@@ -6212,7 +6212,7 @@
             </a:pPr>
             <a:r>
               <a:rPr/>
-              <a:t>🧿 AI Cross-Check</a:t>
+              <a:t>🤖 AI Cross-Check</a:t>
             </a:r>
           </a:p>
         </p:txBody>
@@ -6558,7 +6558,7 @@
             </a:pPr>
             <a:r>
               <a:rPr/>
-              <a:t>TCD §3 drafted</a:t>
+              <a:t>TCD Section 3 drafted</a:t>
             </a:r>
           </a:p>
           <a:p>
@@ -6603,7 +6603,7 @@
             </a:pPr>
             <a:r>
               <a:rPr/>
-              <a:t>Bring to Day 3: Your TCD §§1–3 + the integration table from Day 1. Tomorrow we draw.</a:t>
+              <a:t>Bring to Day 3: Your TCD Sections 1–3 + the integration table from Day 1. Tomorrow we draw.</a:t>
             </a:r>
           </a:p>
         </p:txBody>
@@ -6903,7 +6903,7 @@
             </a:pPr>
             <a:r>
               <a:rPr/>
-              <a:t>Recap §§1–2; print STRIDE card</a:t>
+              <a:t>Recap Sections 1–2; print STRIDE card</a:t>
             </a:r>
           </a:p>
           <a:p>

--- a/week-04/presentations/ppts/day-02-system-security-compliance.pptx
+++ b/week-04/presentations/ppts/day-02-system-security-compliance.pptx
@@ -5282,7 +5282,7 @@
             </a:pPr>
             <a:r>
               <a:rPr/>
-              <a:t>“Use security best practices” is not a mitigation. “Validate JWT signature against IdP-published key, with 5-minute clock skew” is.</a:t>
+              <a:t>“Use security best practices” — or a bare “Transport Layer Security (TLS)” — is not a mitigation. “Validate JWT signature against IdP-published key, with 5-minute clock skew” is.</a:t>
             </a:r>
           </a:p>
         </p:txBody>
@@ -5413,7 +5413,7 @@
             </a:pPr>
             <a:r>
               <a:rPr/>
-              <a:t>Re-draw the data flow from yesterday’s integration table + PRD Section 5. Run the STRIDE walk. Document top 5 threats.</a:t>
+              <a:t>Re-draw the data flow from yesterday’s integration table + Product Requirements Document (PRD) Section 5. Run the STRIDE walk. Document top 5 threats.</a:t>
             </a:r>
           </a:p>
           <a:p>
@@ -5623,7 +5623,7 @@
             </a:pPr>
             <a:r>
               <a:rPr/>
-              <a:t>GDPR, CCPA, US state privacy laws. Personal data handling, consent, deletion.</a:t>
+              <a:t>GDPR, California Consumer Privacy Act (CCPA), US state privacy laws. Personally identifiable information (PII) handling, consent, deletion.</a:t>
             </a:r>
           </a:p>
           <a:p>
@@ -5641,7 +5641,7 @@
             </a:pPr>
             <a:r>
               <a:rPr/>
-              <a:t>HIPAA, PCI-DSS, FERPA, SOX, etc. Pulled in by data type or customer industry.</a:t>
+              <a:t>HIPAA (health records), PCI-DSS (card data), FERPA (student records), SOX (financial reporting), etc. Pulled in by data type or customer industry.</a:t>
             </a:r>
           </a:p>
           <a:p>
@@ -5863,7 +5863,7 @@
             </a:pPr>
             <a:r>
               <a:rPr/>
-              <a:t>The TCD Section 3 doesn’t replace PRD Section 7. It deepens it. Both ship.</a:t>
+              <a:t>The Technical Concept Document (TCD) Section 3 doesn’t replace PRD Section 7. It deepens it — e.g., a loose “single sign-on (SSO)” line becomes a concrete scope. Both ship.</a:t>
             </a:r>
           </a:p>
         </p:txBody>
@@ -6750,7 +6750,7 @@
             </a:pPr>
             <a:r>
               <a:rPr/>
-              <a:t>Apply the STRIDE threat-model to a feature’s data flow</a:t>
+              <a:t>Apply the STRIDE threat model (Spoofing, Tampering, Repudiation, Information disclosure, Denial of service, Elevation of privilege) to a feature’s data flow</a:t>
             </a:r>
           </a:p>
           <a:p>
@@ -6777,7 +6777,7 @@
             </a:pPr>
             <a:r>
               <a:rPr/>
-              <a:t>Rewrite the Week-3 first-draft security NFRs at architecture level</a:t>
+              <a:t>Rewrite the Week-3 first-draft security non-functional requirements (NFRs) at architecture level</a:t>
             </a:r>
           </a:p>
           <a:p>

--- a/week-04/presentations/ppts/day-02-system-security-compliance.pptx
+++ b/week-04/presentations/ppts/day-02-system-security-compliance.pptx
@@ -5623,7 +5623,7 @@
             </a:pPr>
             <a:r>
               <a:rPr/>
-              <a:t>GDPR, California Consumer Privacy Act (CCPA), US state privacy laws. Personally identifiable information (PII) handling, consent, deletion.</a:t>
+              <a:t>General Data Protection Regulation (GDPR), California Consumer Privacy Act (CCPA). PII handling, consent, deletion.</a:t>
             </a:r>
           </a:p>
           <a:p>

--- a/week-04/presentations/ppts/day-02-system-security-compliance.pptx
+++ b/week-04/presentations/ppts/day-02-system-security-compliance.pptx
@@ -5277,6 +5277,24 @@
           <a:bodyPr/>
           <a:lstStyle/>
           <a:p>
+            <a:pPr lvl="0" indent="0">
+              <a:buNone/>
+            </a:pPr>
+            <a:r>
+              <a:rPr>
+                <a:latin typeface="Courier"/>
+              </a:rPr>
+              <a:t>### Threat — &lt;short name&gt;
+**STRIDE letter:** S / T / R / I / D / E
+**Where:** [box or arrow in your data flow]
+**Scenario:** [one sentence]
+**Likelihood:** L / M / H
+**Impact:** L / M / H
+**Mitigation:** [specific control; "TLS" is not a complete answer]
+**Owner:** [security team, you, the architect]</a:t>
+            </a:r>
+          </a:p>
+          <a:p>
             <a:pPr lvl="0" indent="0" marL="0">
               <a:buNone/>
             </a:pPr>
@@ -5334,6 +5352,43 @@
           </a:p>
         </p:txBody>
       </p:sp>
+      <p:sp>
+        <p:nvSpPr>
+          <p:cNvPr id="3" name="Content Placeholder 2"/>
+          <p:cNvSpPr>
+            <a:spLocks noGrp="1"/>
+          </p:cNvSpPr>
+          <p:nvPr>
+            <p:ph idx="1"/>
+          </p:nvPr>
+        </p:nvSpPr>
+        <p:spPr/>
+        <p:txBody>
+          <a:bodyPr/>
+          <a:lstStyle/>
+          <a:p>
+            <a:pPr lvl="0" indent="0">
+              <a:buNone/>
+            </a:pPr>
+            <a:r>
+              <a:rPr>
+                <a:latin typeface="Courier"/>
+              </a:rPr>
+              <a:t>### Threat — Repudiation of reconcile submission
+**STRIDE letter:** R
+**Where:** [Mobile app] →(submit)→ [Reconcile API]
+**Scenario:** A dispatcher denies submitting a reconcile that
+triggered an incorrect timecard charge.
+**Likelihood:** L
+**Impact:** H (wage-and-hour audit exposure)
+**Mitigation:** Server-side audit event with: dispatcher_id, ticket_ids,
+timestamp, signed JWT used, user-agent. 24-month retention.
+Tied to NFR-Audit-Trail.
+**Owner:** Security architect (validates retention; we own implementation).</a:t>
+            </a:r>
+          </a:p>
+        </p:txBody>
+      </p:sp>
     </p:spTree>
   </p:cSld>
 </p:sld>
@@ -6232,6 +6287,25 @@
           <a:bodyPr/>
           <a:lstStyle/>
           <a:p>
+            <a:pPr lvl="0" indent="0">
+              <a:buNone/>
+            </a:pPr>
+            <a:r>
+              <a:rPr>
+                <a:latin typeface="Courier"/>
+              </a:rPr>
+              <a:t>Role: Senior security architect.
+Context: &lt;paste the security brief&gt;
+Task: What's the strongest objection a senior security architect
+would raise after reading this brief?
+Constraints:
+- Be specific to the data and integrations described
+- Do not suggest generic best practices
+- Flag any place rationale relies on un-stated assumptions
+Format: Top 3 objections, each with a scenario.</a:t>
+            </a:r>
+          </a:p>
+          <a:p>
             <a:pPr lvl="0" indent="0" marL="0">
               <a:buNone/>
             </a:pPr>
@@ -7420,6 +7494,23 @@
             <a:r>
               <a:rPr/>
               <a:t>A threat model is a walk along the data flow. Where does data come from, where does it move to, where does it stop, who can read or change it at each step?</a:t>
+            </a:r>
+          </a:p>
+          <a:p>
+            <a:pPr lvl="0" indent="0">
+              <a:buNone/>
+            </a:pPr>
+            <a:r>
+              <a:rPr>
+                <a:latin typeface="Courier"/>
+              </a:rPr>
+              <a:t>[User] →(auth)→ [Frontend] →(API)→ [Backend service]
+↓
+[Datastore]
+↓
+[Audit / events]
+↓
+[Downstream consumer]</a:t>
             </a:r>
           </a:p>
           <a:p>

--- a/week-04/presentations/ppts/day-02-system-security-compliance.pptx
+++ b/week-04/presentations/ppts/day-02-system-security-compliance.pptx
@@ -955,7 +955,7 @@
             </a:pPr>
             <a:r>
               <a:rPr/>
-              <a:t>Triads should keep their PRD Section 7 in place — but reference the TCD Section 3 as the authoritative version for the architecture conversation.</a:t>
+              <a:t>Quads should keep their PRD Section 7 in place — but reference the TCD Section 3 as the authoritative version for the architecture conversation.</a:t>
             </a:r>
           </a:p>
         </p:txBody>
@@ -1037,7 +1037,7 @@
             </a:pPr>
             <a:r>
               <a:rPr/>
-              <a:t>Triads who skipped Compliance NFRs in Week 3 will struggle here. Coach without rescuing.</a:t>
+              <a:t>Quads who skipped Compliance NFRs in Week 3 will struggle here. Coach without rescuing.</a:t>
             </a:r>
           </a:p>
         </p:txBody>
@@ -1119,7 +1119,7 @@
             </a:pPr>
             <a:r>
               <a:rPr/>
-              <a:t>The security brief is the deliverable security partners actually want before a review. Triads draft the one-pager so the conversation starts at “your top three” rather than “what’s the feature.”</a:t>
+              <a:t>The security brief is the deliverable security partners actually want before a review. Quads draft the one-pager so the conversation starts at “your top three” rather than “what’s the feature.”</a:t>
             </a:r>
           </a:p>
         </p:txBody>
@@ -1365,7 +1365,7 @@
             </a:pPr>
             <a:r>
               <a:rPr/>
-              <a:t>Wrap-share: each triad names 1 surprising threat, 1 NFR that changed materially, 1 question for security.</a:t>
+              <a:t>Wrap-share: each quad names 1 surprising threat, 1 NFR that changed materially, 1 question for security.</a:t>
             </a:r>
           </a:p>
         </p:txBody>
@@ -1775,7 +1775,7 @@
             </a:pPr>
             <a:r>
               <a:rPr/>
-              <a:t>STRIDE is the shared vocabulary security teams use. Walk all six letters before triads apply them — half-applied STRIDE is worse than none.</a:t>
+              <a:t>STRIDE is the shared vocabulary security teams use. Walk all six letters before quads apply them — half-applied STRIDE is worse than none.</a:t>
             </a:r>
           </a:p>
         </p:txBody>
@@ -1857,7 +1857,7 @@
             </a:pPr>
             <a:r>
               <a:rPr/>
-              <a:t>If a triad’s threat list has 0 R’s, push them.</a:t>
+              <a:t>If a quad’s threat list has 0 R’s, push them.</a:t>
             </a:r>
           </a:p>
         </p:txBody>
@@ -1939,7 +1939,7 @@
             </a:pPr>
             <a:r>
               <a:rPr/>
-              <a:t>For each arrow + box, the triad asks each letter. Most arrows have S+T+I; most boxes have T+R+I. Not exhaustive — a starting point.</a:t>
+              <a:t>For each arrow + box, the quad asks each letter. Most arrows have S+T+I; most boxes have T+R+I. Not exhaustive — a starting point.</a:t>
             </a:r>
           </a:p>
         </p:txBody>
@@ -2021,7 +2021,7 @@
             </a:pPr>
             <a:r>
               <a:rPr/>
-              <a:t>Triads will miss Repudiation on the magic-link step. Surface that finding publicly.</a:t>
+              <a:t>Quads will miss Repudiation on the magic-link step. Surface that finding publicly.</a:t>
             </a:r>
           </a:p>
         </p:txBody>
@@ -2103,7 +2103,7 @@
             </a:pPr>
             <a:r>
               <a:rPr/>
-              <a:t>Triads now STRIDE their actual feature. Push past S and I — T and R are usually the most-missed and the highest-value threats to surface.</a:t>
+              <a:t>Quads now STRIDE their actual feature. Push past S and I — T and R are usually the most-missed and the highest-value threats to surface.</a:t>
             </a:r>
           </a:p>
         </p:txBody>
@@ -5459,7 +5459,7 @@
             </a:pPr>
             <a:r>
               <a:rPr b="1"/>
-              <a:t>Triads • 40 minutes</a:t>
+              <a:t>Quads • 40 minutes</a:t>
             </a:r>
           </a:p>
           <a:p>
@@ -5993,7 +5993,7 @@
             </a:pPr>
             <a:r>
               <a:rPr b="1"/>
-              <a:t>Triads • 40 minutes</a:t>
+              <a:t>Quads • 40 minutes</a:t>
             </a:r>
           </a:p>
           <a:p>
@@ -6461,7 +6461,7 @@
             </a:pPr>
             <a:r>
               <a:rPr b="1"/>
-              <a:t>Triads • 45 minutes • Wrap</a:t>
+              <a:t>Quads • 45 minutes • Wrap</a:t>
             </a:r>
           </a:p>
           <a:p>
@@ -7612,7 +7612,7 @@
             </a:pPr>
             <a:r>
               <a:rPr b="1"/>
-              <a:t>Triads • 35 minutes</a:t>
+              <a:t>Quads • 35 minutes</a:t>
             </a:r>
           </a:p>
           <a:p>

--- a/week-04/presentations/ppts/day-02-system-security-compliance.pptx
+++ b/week-04/presentations/ppts/day-02-system-security-compliance.pptx
@@ -5459,7 +5459,7 @@
             </a:pPr>
             <a:r>
               <a:rPr b="1"/>
-              <a:t>Quads • 40 minutes</a:t>
+              <a:t>Quads • 50 minutes</a:t>
             </a:r>
           </a:p>
           <a:p>
@@ -5993,7 +5993,7 @@
             </a:pPr>
             <a:r>
               <a:rPr b="1"/>
-              <a:t>Quads • 40 minutes</a:t>
+              <a:t>Quads • 50 minutes</a:t>
             </a:r>
           </a:p>
           <a:p>
@@ -6461,7 +6461,7 @@
             </a:pPr>
             <a:r>
               <a:rPr b="1"/>
-              <a:t>Quads • 45 minutes • Wrap</a:t>
+              <a:t>Quads • 55 minutes • Wrap</a:t>
             </a:r>
           </a:p>
           <a:p>
@@ -7612,7 +7612,7 @@
             </a:pPr>
             <a:r>
               <a:rPr b="1"/>
-              <a:t>Quads • 35 minutes</a:t>
+              <a:t>Quads • 45 minutes</a:t>
             </a:r>
           </a:p>
           <a:p>

--- a/week-04/presentations/ppts/day-02-system-security-compliance.pptx
+++ b/week-04/presentations/ppts/day-02-system-security-compliance.pptx
@@ -5486,7 +5486,7 @@
             </a:pPr>
             <a:r>
               <a:rPr/>
-              <a:t>20 min: STRIDE walk</a:t>
+              <a:t>30 min: STRIDE walk</a:t>
             </a:r>
           </a:p>
           <a:p>
@@ -5504,7 +5504,7 @@
             </a:pPr>
             <a:r>
               <a:rPr/>
-              <a:t>⏱ 10 + 20 + 10</a:t>
+              <a:t>⏱ 10 + 30 + 10</a:t>
             </a:r>
           </a:p>
         </p:txBody>
@@ -6020,7 +6020,7 @@
             </a:pPr>
             <a:r>
               <a:rPr/>
-              <a:t>15 min: list specific controls per frame</a:t>
+              <a:t>25 min: list specific controls per frame</a:t>
             </a:r>
           </a:p>
           <a:p>
@@ -6038,7 +6038,7 @@
             </a:pPr>
             <a:r>
               <a:rPr/>
-              <a:t>⏱ 10 + 15 + 15</a:t>
+              <a:t>⏱ 10 + 25 + 15</a:t>
             </a:r>
           </a:p>
         </p:txBody>
@@ -6479,7 +6479,7 @@
             </a:pPr>
             <a:r>
               <a:rPr/>
-              <a:t>15 min: 5 questions for security</a:t>
+              <a:t>25 min: 5 questions for security</a:t>
             </a:r>
           </a:p>
           <a:p>
@@ -6515,7 +6515,7 @@
             </a:pPr>
             <a:r>
               <a:rPr/>
-              <a:t>⏱ 15 + 10 + 15 + 5 · 15-min wrap</a:t>
+              <a:t>⏱ 25 + 10 + 15 + 5 · 15-min wrap</a:t>
             </a:r>
           </a:p>
         </p:txBody>
@@ -7639,7 +7639,7 @@
             </a:pPr>
             <a:r>
               <a:rPr/>
-              <a:t>20 min: STRIDE walk (6 letters per step)</a:t>
+              <a:t>30 min: STRIDE walk (6 letters per step)</a:t>
             </a:r>
           </a:p>
           <a:p>
@@ -7657,7 +7657,7 @@
             </a:pPr>
             <a:r>
               <a:rPr/>
-              <a:t>⏱ 5 + 20 + 10</a:t>
+              <a:t>⏱ 5 + 30 + 10</a:t>
             </a:r>
           </a:p>
         </p:txBody>
